--- a/Day 2/Day 2-Data Science Lifecycle & Tools.pptx
+++ b/Day 2/Day 2-Data Science Lifecycle & Tools.pptx
@@ -572,7 +572,7 @@
             </a:ln>
             <a:extLst>
               <a:ext uri="{91240B29-F687-4f45-9708-019B960494DF}">
-                <a14:hiddenLine xmlns:a14="http://schemas.microsoft.com/office/drawing/2010/main" xmlns="" w="9525">
+                <a14:hiddenLine xmlns="" xmlns:a14="http://schemas.microsoft.com/office/drawing/2010/main" w="9525">
                   <a:solidFill>
                     <a:srgbClr val="000000"/>
                   </a:solidFill>
@@ -769,7 +769,7 @@
           <a:p>
             <a:fld id="{5BCAD085-E8A6-8845-BD4E-CB4CCA059FC4}" type="datetimeFigureOut">
               <a:rPr lang="en-US" smtClean="0"/>
-              <a:t>3/20/2025</a:t>
+              <a:t>3/21/2025</a:t>
             </a:fld>
             <a:endParaRPr lang="en-US"/>
           </a:p>
@@ -1653,7 +1653,7 @@
             </a:ln>
             <a:extLst>
               <a:ext uri="{91240B29-F687-4f45-9708-019B960494DF}">
-                <a14:hiddenLine xmlns:a14="http://schemas.microsoft.com/office/drawing/2010/main" xmlns="" w="9525">
+                <a14:hiddenLine xmlns="" xmlns:a14="http://schemas.microsoft.com/office/drawing/2010/main" w="9525">
                   <a:solidFill>
                     <a:srgbClr val="000000"/>
                   </a:solidFill>
@@ -1870,7 +1870,7 @@
           <a:p>
             <a:fld id="{5BCAD085-E8A6-8845-BD4E-CB4CCA059FC4}" type="datetimeFigureOut">
               <a:rPr lang="en-US" smtClean="0"/>
-              <a:t>3/20/2025</a:t>
+              <a:t>3/21/2025</a:t>
             </a:fld>
             <a:endParaRPr lang="en-US"/>
           </a:p>
@@ -2739,7 +2739,7 @@
             </a:ln>
             <a:extLst>
               <a:ext uri="{91240B29-F687-4f45-9708-019B960494DF}">
-                <a14:hiddenLine xmlns:a14="http://schemas.microsoft.com/office/drawing/2010/main" xmlns="" w="9525">
+                <a14:hiddenLine xmlns="" xmlns:a14="http://schemas.microsoft.com/office/drawing/2010/main" w="9525">
                   <a:solidFill>
                     <a:srgbClr val="000000"/>
                   </a:solidFill>
@@ -2868,7 +2868,7 @@
           <a:p>
             <a:fld id="{5BCAD085-E8A6-8845-BD4E-CB4CCA059FC4}" type="datetimeFigureOut">
               <a:rPr lang="en-US" smtClean="0"/>
-              <a:t>3/20/2025</a:t>
+              <a:t>3/21/2025</a:t>
             </a:fld>
             <a:endParaRPr lang="en-US"/>
           </a:p>
@@ -3700,7 +3700,7 @@
             </a:ln>
             <a:extLst>
               <a:ext uri="{91240B29-F687-4f45-9708-019B960494DF}">
-                <a14:hiddenLine xmlns:a14="http://schemas.microsoft.com/office/drawing/2010/main" xmlns="" w="9525">
+                <a14:hiddenLine xmlns="" xmlns:a14="http://schemas.microsoft.com/office/drawing/2010/main" w="9525">
                   <a:solidFill>
                     <a:srgbClr val="000000"/>
                   </a:solidFill>
@@ -3983,7 +3983,7 @@
           <a:p>
             <a:fld id="{5BCAD085-E8A6-8845-BD4E-CB4CCA059FC4}" type="datetimeFigureOut">
               <a:rPr lang="en-US" smtClean="0"/>
-              <a:t>3/20/2025</a:t>
+              <a:t>3/21/2025</a:t>
             </a:fld>
             <a:endParaRPr lang="en-US"/>
           </a:p>
@@ -4815,7 +4815,7 @@
             </a:ln>
             <a:extLst>
               <a:ext uri="{91240B29-F687-4f45-9708-019B960494DF}">
-                <a14:hiddenLine xmlns:a14="http://schemas.microsoft.com/office/drawing/2010/main" xmlns="" w="9525">
+                <a14:hiddenLine xmlns="" xmlns:a14="http://schemas.microsoft.com/office/drawing/2010/main" w="9525">
                   <a:solidFill>
                     <a:srgbClr val="000000"/>
                   </a:solidFill>
@@ -4997,7 +4997,7 @@
           <a:p>
             <a:fld id="{5BCAD085-E8A6-8845-BD4E-CB4CCA059FC4}" type="datetimeFigureOut">
               <a:rPr lang="en-US" smtClean="0"/>
-              <a:t>3/20/2025</a:t>
+              <a:t>3/21/2025</a:t>
             </a:fld>
             <a:endParaRPr lang="en-US"/>
           </a:p>
@@ -5669,7 +5669,7 @@
           <a:p>
             <a:fld id="{5BCAD085-E8A6-8845-BD4E-CB4CCA059FC4}" type="datetimeFigureOut">
               <a:rPr lang="en-US" smtClean="0"/>
-              <a:t>3/20/2025</a:t>
+              <a:t>3/21/2025</a:t>
             </a:fld>
             <a:endParaRPr lang="en-US"/>
           </a:p>
@@ -6542,7 +6542,7 @@
           <a:p>
             <a:fld id="{5BCAD085-E8A6-8845-BD4E-CB4CCA059FC4}" type="datetimeFigureOut">
               <a:rPr lang="en-US" smtClean="0"/>
-              <a:t>3/20/2025</a:t>
+              <a:t>3/21/2025</a:t>
             </a:fld>
             <a:endParaRPr lang="en-US"/>
           </a:p>
@@ -6729,7 +6729,7 @@
           <a:p>
             <a:fld id="{5BCAD085-E8A6-8845-BD4E-CB4CCA059FC4}" type="datetimeFigureOut">
               <a:rPr lang="en-US" smtClean="0"/>
-              <a:t>3/20/2025</a:t>
+              <a:t>3/21/2025</a:t>
             </a:fld>
             <a:endParaRPr lang="en-US"/>
           </a:p>
@@ -7564,7 +7564,7 @@
           </a:ln>
           <a:extLst>
             <a:ext uri="{91240B29-F687-4f45-9708-019B960494DF}">
-              <a14:hiddenLine xmlns:a14="http://schemas.microsoft.com/office/drawing/2010/main" xmlns="" w="9525">
+              <a14:hiddenLine xmlns="" xmlns:a14="http://schemas.microsoft.com/office/drawing/2010/main" w="9525">
                 <a:solidFill>
                   <a:srgbClr val="000000"/>
                 </a:solidFill>
@@ -7678,7 +7678,7 @@
           <a:p>
             <a:fld id="{5BCAD085-E8A6-8845-BD4E-CB4CCA059FC4}" type="datetimeFigureOut">
               <a:rPr lang="en-US" smtClean="0"/>
-              <a:t>3/20/2025</a:t>
+              <a:t>3/21/2025</a:t>
             </a:fld>
             <a:endParaRPr lang="en-US"/>
           </a:p>
@@ -7910,7 +7910,7 @@
           <a:p>
             <a:fld id="{5BCAD085-E8A6-8845-BD4E-CB4CCA059FC4}" type="datetimeFigureOut">
               <a:rPr lang="en-US" smtClean="0"/>
-              <a:t>3/20/2025</a:t>
+              <a:t>3/21/2025</a:t>
             </a:fld>
             <a:endParaRPr lang="en-US"/>
           </a:p>
@@ -8739,7 +8739,7 @@
             </a:ln>
             <a:extLst>
               <a:ext uri="{91240B29-F687-4f45-9708-019B960494DF}">
-                <a14:hiddenLine xmlns:a14="http://schemas.microsoft.com/office/drawing/2010/main" xmlns="" w="9525">
+                <a14:hiddenLine xmlns="" xmlns:a14="http://schemas.microsoft.com/office/drawing/2010/main" w="9525">
                   <a:solidFill>
                     <a:srgbClr val="000000"/>
                   </a:solidFill>
@@ -8921,7 +8921,7 @@
           <a:p>
             <a:fld id="{5BCAD085-E8A6-8845-BD4E-CB4CCA059FC4}" type="datetimeFigureOut">
               <a:rPr lang="en-US" smtClean="0"/>
-              <a:t>3/20/2025</a:t>
+              <a:t>3/21/2025</a:t>
             </a:fld>
             <a:endParaRPr lang="en-US"/>
           </a:p>
@@ -9205,7 +9205,7 @@
           <a:p>
             <a:fld id="{5BCAD085-E8A6-8845-BD4E-CB4CCA059FC4}" type="datetimeFigureOut">
               <a:rPr lang="en-US" smtClean="0"/>
-              <a:t>3/20/2025</a:t>
+              <a:t>3/21/2025</a:t>
             </a:fld>
             <a:endParaRPr lang="en-US"/>
           </a:p>
@@ -9605,7 +9605,7 @@
           <a:p>
             <a:fld id="{5BCAD085-E8A6-8845-BD4E-CB4CCA059FC4}" type="datetimeFigureOut">
               <a:rPr lang="en-US" smtClean="0"/>
-              <a:t>3/20/2025</a:t>
+              <a:t>3/21/2025</a:t>
             </a:fld>
             <a:endParaRPr lang="en-US"/>
           </a:p>
@@ -9735,7 +9735,7 @@
           <a:p>
             <a:fld id="{5BCAD085-E8A6-8845-BD4E-CB4CCA059FC4}" type="datetimeFigureOut">
               <a:rPr lang="en-US" smtClean="0"/>
-              <a:t>3/20/2025</a:t>
+              <a:t>3/21/2025</a:t>
             </a:fld>
             <a:endParaRPr lang="en-US"/>
           </a:p>
@@ -9878,7 +9878,7 @@
           <a:p>
             <a:fld id="{5BCAD085-E8A6-8845-BD4E-CB4CCA059FC4}" type="datetimeFigureOut">
               <a:rPr lang="en-US" smtClean="0"/>
-              <a:t>3/20/2025</a:t>
+              <a:t>3/21/2025</a:t>
             </a:fld>
             <a:endParaRPr lang="en-US"/>
           </a:p>
@@ -10707,7 +10707,7 @@
             </a:ln>
             <a:extLst>
               <a:ext uri="{91240B29-F687-4f45-9708-019B960494DF}">
-                <a14:hiddenLine xmlns:a14="http://schemas.microsoft.com/office/drawing/2010/main" xmlns="" w="9525">
+                <a14:hiddenLine xmlns="" xmlns:a14="http://schemas.microsoft.com/office/drawing/2010/main" w="9525">
                   <a:solidFill>
                     <a:srgbClr val="000000"/>
                   </a:solidFill>
@@ -10900,7 +10900,7 @@
           <a:p>
             <a:fld id="{5BCAD085-E8A6-8845-BD4E-CB4CCA059FC4}" type="datetimeFigureOut">
               <a:rPr lang="en-US" smtClean="0"/>
-              <a:t>3/20/2025</a:t>
+              <a:t>3/21/2025</a:t>
             </a:fld>
             <a:endParaRPr lang="en-US"/>
           </a:p>
@@ -11765,7 +11765,7 @@
             </a:ln>
             <a:extLst>
               <a:ext uri="{91240B29-F687-4f45-9708-019B960494DF}">
-                <a14:hiddenLine xmlns:a14="http://schemas.microsoft.com/office/drawing/2010/main" xmlns="" w="9525">
+                <a14:hiddenLine xmlns="" xmlns:a14="http://schemas.microsoft.com/office/drawing/2010/main" w="9525">
                   <a:solidFill>
                     <a:srgbClr val="000000"/>
                   </a:solidFill>
@@ -11982,7 +11982,7 @@
           <a:p>
             <a:fld id="{5BCAD085-E8A6-8845-BD4E-CB4CCA059FC4}" type="datetimeFigureOut">
               <a:rPr lang="en-US" smtClean="0"/>
-              <a:t>3/20/2025</a:t>
+              <a:t>3/21/2025</a:t>
             </a:fld>
             <a:endParaRPr lang="en-US"/>
           </a:p>
@@ -12815,7 +12815,7 @@
             </a:ln>
             <a:extLst>
               <a:ext uri="{91240B29-F687-4f45-9708-019B960494DF}">
-                <a14:hiddenLine xmlns:a14="http://schemas.microsoft.com/office/drawing/2010/main" xmlns="" w="9525">
+                <a14:hiddenLine xmlns="" xmlns:a14="http://schemas.microsoft.com/office/drawing/2010/main" w="9525">
                   <a:solidFill>
                     <a:srgbClr val="000000"/>
                   </a:solidFill>
@@ -12956,7 +12956,7 @@
           <a:p>
             <a:fld id="{5BCAD085-E8A6-8845-BD4E-CB4CCA059FC4}" type="datetimeFigureOut">
               <a:rPr lang="en-US" smtClean="0"/>
-              <a:t>3/20/2025</a:t>
+              <a:t>3/21/2025</a:t>
             </a:fld>
             <a:endParaRPr lang="en-US"/>
           </a:p>
@@ -13536,11 +13536,14 @@
           <a:lstStyle/>
           <a:p>
             <a:r>
-              <a:rPr dirty="0">
+              <a:rPr dirty="0" smtClean="0">
                 <a:latin typeface="Gill Sans MT" panose="020B0502020104020203" pitchFamily="34" charset="0"/>
               </a:rPr>
               <a:t>Data Science Lifecycle &amp; Tools</a:t>
             </a:r>
+            <a:endParaRPr dirty="0">
+              <a:latin typeface="Gill Sans MT" panose="020B0502020104020203" pitchFamily="34" charset="0"/>
+            </a:endParaRPr>
           </a:p>
         </p:txBody>
       </p:sp>
